--- a/docs/solution_presentation.pptx
+++ b/docs/solution_presentation.pptx
@@ -3349,7 +3349,7 @@
                 </a:solidFill>
                 <a:latin typeface="Cambria"/>
               </a:rPr>
-              <a:t>107</a:t>
+              <a:t>126</a:t>
             </a:r>
           </a:p>
           <a:p>
@@ -3404,7 +3404,7 @@
                 </a:solidFill>
                 <a:latin typeface="Cambria"/>
               </a:rPr>
-              <a:t>13</a:t>
+              <a:t>37</a:t>
             </a:r>
           </a:p>
           <a:p>
@@ -3420,7 +3420,7 @@
                 </a:solidFill>
                 <a:latin typeface="Calibri"/>
               </a:rPr>
-              <a:t>reconciliation rules</a:t>
+              <a:t>checks, 0 failures</a:t>
             </a:r>
           </a:p>
         </p:txBody>
@@ -3636,8 +3636,8 @@
         </p:blipFill>
         <p:spPr>
           <a:xfrm>
-            <a:off x="685800" y="1691640"/>
-            <a:ext cx="5029200" cy="4023360"/>
+            <a:off x="685800" y="1783080"/>
+            <a:ext cx="6309360" cy="3701491"/>
           </a:xfrm>
           <a:prstGeom prst="rect">
             <a:avLst/>
@@ -3660,8 +3660,8 @@
         </p:blipFill>
         <p:spPr>
           <a:xfrm>
-            <a:off x="6583680" y="1691640"/>
-            <a:ext cx="3176337" cy="4023360"/>
+            <a:off x="7269480" y="1783080"/>
+            <a:ext cx="4323521" cy="3977639"/>
           </a:xfrm>
           <a:prstGeom prst="rect">
             <a:avLst/>
@@ -3715,8 +3715,8 @@
         </p:nvSpPr>
         <p:spPr>
           <a:xfrm>
-            <a:off x="6583680" y="5897880"/>
-            <a:ext cx="4892040" cy="457200"/>
+            <a:off x="7269480" y="5897880"/>
+            <a:ext cx="4206240" cy="457200"/>
           </a:xfrm>
           <a:prstGeom prst="rect">
             <a:avLst/>
@@ -4060,7 +4060,7 @@
                 </a:solidFill>
                 <a:latin typeface="Calibri"/>
               </a:rPr>
-              <a:t>107 tests, zero network</a:t>
+              <a:t>126 tests, zero network</a:t>
             </a:r>
           </a:p>
           <a:p>
@@ -6698,7 +6698,7 @@
 Architecture diagram
 Deployment runbook
 Sample JSON outputs from the real pipeline
-107 automated tests</a:t>
+126 automated tests</a:t>
             </a:r>
           </a:p>
         </p:txBody>
@@ -10976,7 +10976,7 @@
                 </a:solidFill>
                 <a:latin typeface="Calibri"/>
               </a:rPr>
-              <a:t>Tolerance   |calc − reported| ≤ 1.0   OR   relative variance ≤ 0.5%   — both configurable</a:t>
+              <a:t>Tolerance   |calc − reported|  ≤  0.1  +  1e-5 × magnitude   — a combined allowance, both terms configurable</a:t>
             </a:r>
           </a:p>
           <a:p>
@@ -10992,7 +10992,7 @@
                 </a:solidFill>
                 <a:latin typeface="Calibri"/>
               </a:rPr>
-              <a:t>Absolute-only is far too strict on figures in the hundreds of thousands of crore; relative-only is far too strict near zero. A missing operand returns NOT_APPLICABLE and never fails the document.</a:t>
+              <a:t>An OR of absolute-or-relative is too loose at both ends: a 0.5% relative limit passes a 20,000-crore discrepancy, while an absolute limit sized for a statement is 11% of a 9.00 till receipt. A missing operand returns NOT_APPLICABLE and never fails the document.</a:t>
             </a:r>
           </a:p>
         </p:txBody>

--- a/docs/solution_presentation.pptx
+++ b/docs/solution_presentation.pptx
@@ -3800,7 +3800,7 @@
                 </a:solidFill>
                 <a:latin typeface="Georgia"/>
               </a:rPr>
-              <a:t>138</a:t>
+              <a:t>140</a:t>
             </a:r>
           </a:p>
           <a:p>
@@ -4205,20 +4205,14 @@
       </p:sp>
       <p:pic>
         <p:nvPicPr>
-          <p:cNvPr id="6" name="Picture 5">
-            <a:extLst>
-              <a:ext uri="{FF2B5EF4-FFF2-40B4-BE49-F238E27FC236}">
-                <a16:creationId xmlns:a16="http://schemas.microsoft.com/office/drawing/2014/main" id="{D4BEA743-D05D-CA82-D0AF-BE16DC765F01}"/>
-              </a:ext>
-            </a:extLst>
-          </p:cNvPr>
+          <p:cNvPr id="16" name="Picture 15" descr="dashboard.png"/>
           <p:cNvPicPr>
             <a:picLocks noChangeAspect="1"/>
           </p:cNvPicPr>
           <p:nvPr/>
         </p:nvPicPr>
         <p:blipFill>
-          <a:blip r:embed="rId2"/>
+          <a:blip r:embed="rId5"/>
           <a:stretch>
             <a:fillRect/>
           </a:stretch>
@@ -4226,7 +4220,7 @@
         <p:spPr>
           <a:xfrm>
             <a:off x="522807" y="1664208"/>
-            <a:ext cx="6223866" cy="3955693"/>
+            <a:ext cx="5817195" cy="3955693"/>
           </a:xfrm>
           <a:prstGeom prst="rect">
             <a:avLst/>
@@ -4235,20 +4229,14 @@
       </p:pic>
       <p:pic>
         <p:nvPicPr>
-          <p:cNvPr id="13" name="Picture 12">
-            <a:extLst>
-              <a:ext uri="{FF2B5EF4-FFF2-40B4-BE49-F238E27FC236}">
-                <a16:creationId xmlns:a16="http://schemas.microsoft.com/office/drawing/2014/main" id="{CBA17706-883A-56FA-3460-1F0FCBA09400}"/>
-              </a:ext>
-            </a:extLst>
-          </p:cNvPr>
+          <p:cNvPr id="17" name="Picture 16" descr="document_result1.png"/>
           <p:cNvPicPr>
             <a:picLocks noChangeAspect="1"/>
           </p:cNvPicPr>
           <p:nvPr/>
         </p:nvPicPr>
         <p:blipFill>
-          <a:blip r:embed="rId3"/>
+          <a:blip r:embed="rId6"/>
           <a:stretch>
             <a:fillRect/>
           </a:stretch>
@@ -4256,7 +4244,7 @@
         <p:spPr>
           <a:xfrm>
             <a:off x="7269480" y="284248"/>
-            <a:ext cx="3755077" cy="2786003"/>
+            <a:ext cx="3755077" cy="2753723"/>
           </a:xfrm>
           <a:prstGeom prst="rect">
             <a:avLst/>
@@ -4265,20 +4253,14 @@
       </p:pic>
       <p:pic>
         <p:nvPicPr>
-          <p:cNvPr id="15" name="Picture 14">
-            <a:extLst>
-              <a:ext uri="{FF2B5EF4-FFF2-40B4-BE49-F238E27FC236}">
-                <a16:creationId xmlns:a16="http://schemas.microsoft.com/office/drawing/2014/main" id="{F0B1F965-AC6F-A7CC-A535-03D2D61C1797}"/>
-              </a:ext>
-            </a:extLst>
-          </p:cNvPr>
+          <p:cNvPr id="18" name="Picture 17" descr="document_result2.png"/>
           <p:cNvPicPr>
             <a:picLocks noChangeAspect="1"/>
           </p:cNvPicPr>
           <p:nvPr/>
         </p:nvPicPr>
         <p:blipFill>
-          <a:blip r:embed="rId4"/>
+          <a:blip r:embed="rId7"/>
           <a:stretch>
             <a:fillRect/>
           </a:stretch>
@@ -4286,7 +4268,7 @@
         <p:spPr>
           <a:xfrm>
             <a:off x="7269480" y="3134259"/>
-            <a:ext cx="3707303" cy="2699613"/>
+            <a:ext cx="3681290" cy="2699613"/>
           </a:xfrm>
           <a:prstGeom prst="rect">
             <a:avLst/>
@@ -4538,7 +4520,7 @@
             <a:r>
               <a:rPr sz="1300" b="1">
                 <a:solidFill>
-                  <a:srgbClr val="1F4FD8"/>
+                  <a:srgbClr val="4DBD24"/>
                 </a:solidFill>
                 <a:latin typeface="Calibri"/>
               </a:rPr>
@@ -4620,7 +4602,7 @@
                 </a:solidFill>
                 <a:latin typeface="Aptos"/>
               </a:rPr>
-              <a:t>138 tests, zero network</a:t>
+              <a:t>140 tests, zero network</a:t>
             </a:r>
           </a:p>
           <a:p>
@@ -4736,7 +4718,7 @@
             <a:r>
               <a:rPr sz="1300" b="1">
                 <a:solidFill>
-                  <a:srgbClr val="1F4FD8"/>
+                  <a:srgbClr val="4DBD24"/>
                 </a:solidFill>
                 <a:latin typeface="Calibri"/>
               </a:rPr>
@@ -4934,7 +4916,7 @@
             <a:r>
               <a:rPr sz="1300" b="1">
                 <a:solidFill>
-                  <a:srgbClr val="1F4FD8"/>
+                  <a:srgbClr val="4DBD24"/>
                 </a:solidFill>
                 <a:latin typeface="Calibri"/>
               </a:rPr>
@@ -5132,7 +5114,7 @@
             <a:r>
               <a:rPr sz="1300" b="1">
                 <a:solidFill>
-                  <a:srgbClr val="1F4FD8"/>
+                  <a:srgbClr val="4DBD24"/>
                 </a:solidFill>
                 <a:latin typeface="Calibri"/>
               </a:rPr>
@@ -5330,7 +5312,7 @@
             <a:r>
               <a:rPr sz="1300" b="1">
                 <a:solidFill>
-                  <a:srgbClr val="1F4FD8"/>
+                  <a:srgbClr val="4DBD24"/>
                 </a:solidFill>
                 <a:latin typeface="Calibri"/>
               </a:rPr>
@@ -5528,7 +5510,7 @@
             <a:r>
               <a:rPr sz="1300" b="1">
                 <a:solidFill>
-                  <a:srgbClr val="1F4FD8"/>
+                  <a:srgbClr val="4DBD24"/>
                 </a:solidFill>
                 <a:latin typeface="Calibri"/>
               </a:rPr>
@@ -7096,6 +7078,133 @@
               <a:t>Happy to walk through the code, the prompts, the validation logic or the deployment</a:t>
             </a:r>
             <a:endParaRPr lang="en-IN" dirty="0"/>
+          </a:p>
+        </p:txBody>
+      </p:sp>
+      <p:sp>
+        <p:nvSpPr>
+          <p:cNvPr id="17" name="TextBox 16"/>
+          <p:cNvSpPr txBox="1"/>
+          <p:nvPr/>
+        </p:nvSpPr>
+        <p:spPr>
+          <a:xfrm>
+            <a:off x="1033271" y="3794760"/>
+            <a:ext cx="10058400" cy="2011680"/>
+          </a:xfrm>
+          <a:prstGeom prst="rect">
+            <a:avLst/>
+          </a:prstGeom>
+          <a:noFill/>
+        </p:spPr>
+        <p:txBody>
+          <a:bodyPr wrap="square" lIns="0" rIns="0" tIns="0" bIns="0">
+            <a:spAutoFit/>
+          </a:bodyPr>
+          <a:lstStyle/>
+          <a:p>
+            <a:pPr>
+              <a:spcAft>
+                <a:spcPts val="900"/>
+              </a:spcAft>
+            </a:pPr>
+            <a:r>
+              <a:rPr sz="1300" b="1">
+                <a:solidFill>
+                  <a:srgbClr val="171817"/>
+                </a:solidFill>
+                <a:latin typeface="Aptos"/>
+              </a:rPr>
+              <a:t>Live application    </a:t>
+            </a:r>
+            <a:r>
+              <a:rPr sz="1200">
+                <a:solidFill>
+                  <a:srgbClr val="4DBD24"/>
+                </a:solidFill>
+                <a:latin typeface="Consolas"/>
+                <a:hlinkClick r:id="rId2"/>
+              </a:rPr>
+              <a:t>https://document-intelligence-api-lffm.onrender.com</a:t>
+            </a:r>
+          </a:p>
+          <a:p>
+            <a:pPr>
+              <a:spcAft>
+                <a:spcPts val="900"/>
+              </a:spcAft>
+            </a:pPr>
+            <a:r>
+              <a:rPr sz="1300" b="1">
+                <a:solidFill>
+                  <a:srgbClr val="171817"/>
+                </a:solidFill>
+                <a:latin typeface="Aptos"/>
+              </a:rPr>
+              <a:t>Swagger / OpenAPI   </a:t>
+            </a:r>
+            <a:r>
+              <a:rPr sz="1200">
+                <a:solidFill>
+                  <a:srgbClr val="4DBD24"/>
+                </a:solidFill>
+                <a:latin typeface="Consolas"/>
+                <a:hlinkClick r:id="rId3"/>
+              </a:rPr>
+              <a:t>https://document-intelligence-api-lffm.onrender.com/docs</a:t>
+            </a:r>
+          </a:p>
+          <a:p>
+            <a:pPr>
+              <a:spcAft>
+                <a:spcPts val="900"/>
+              </a:spcAft>
+            </a:pPr>
+            <a:r>
+              <a:rPr sz="1300" b="1">
+                <a:solidFill>
+                  <a:srgbClr val="171817"/>
+                </a:solidFill>
+                <a:latin typeface="Aptos"/>
+              </a:rPr>
+              <a:t>Health              </a:t>
+            </a:r>
+            <a:r>
+              <a:rPr sz="1200">
+                <a:solidFill>
+                  <a:srgbClr val="4DBD24"/>
+                </a:solidFill>
+                <a:latin typeface="Consolas"/>
+                <a:hlinkClick r:id="rId4"/>
+              </a:rPr>
+              <a:t>https://document-intelligence-api-lffm.onrender.com/api/v1/health</a:t>
+            </a:r>
+          </a:p>
+          <a:p>
+            <a:pPr>
+              <a:spcAft>
+                <a:spcPts val="900"/>
+              </a:spcAft>
+            </a:pPr>
+            <a:r>
+              <a:rPr sz="1300" b="1">
+                <a:solidFill>
+                  <a:srgbClr val="171817"/>
+                </a:solidFill>
+                <a:latin typeface="Aptos"/>
+              </a:rPr>
+              <a:t>Repository          </a:t>
+            </a:r>
+            <a:r>
+              <a:rPr sz="1200">
+                <a:solidFill>
+                  <a:srgbClr val="4DBD24"/>
+                </a:solidFill>
+                <a:latin typeface="Consolas"/>
+                <a:hlinkClick r:id="rId5"/>
+              </a:rPr>
+              <a:t>https://github.com/ZiyaSadik/document-intelligence-platform</a:t>
+            </a:r>
           </a:p>
         </p:txBody>
       </p:sp>
